--- a/assets/ppts/M1.3_Application_Layer_Paradigms.pptx
+++ b/assets/ppts/M1.3_Application_Layer_Paradigms.pptx
@@ -8,6 +8,7 @@
     <p:sldId id="256" r:id="rId7"/>
     <p:sldId id="257" r:id="rId8"/>
     <p:sldId id="258" r:id="rId9"/>
+    <p:sldId id="259" r:id="rId10"/>
   </p:sldIdLst>
   <p:sldSz cx="12191695" cy="6858000" type="screen4x3"/>
   <p:notesSz cx="6858000" cy="9144000"/>
@@ -3141,8 +3142,8 @@
         </p:nvSpPr>
         <p:spPr>
           <a:xfrm>
-            <a:off x="822960" y="1188720"/>
-            <a:ext cx="164592" cy="4480560"/>
+            <a:off x="0" y="0"/>
+            <a:ext cx="12191695" cy="137160"/>
           </a:xfrm>
           <a:prstGeom prst="rect">
             <a:avLst/>
@@ -3178,14 +3179,57 @@
       </p:sp>
       <p:sp>
         <p:nvSpPr>
-          <p:cNvPr id="4" name="TextBox 3"/>
+          <p:cNvPr id="4" name="Rectangle 3"/>
+          <p:cNvSpPr/>
+          <p:nvPr/>
+        </p:nvSpPr>
+        <p:spPr>
+          <a:xfrm>
+            <a:off x="822960" y="1097280"/>
+            <a:ext cx="164592" cy="4663440"/>
+          </a:xfrm>
+          <a:prstGeom prst="rect">
+            <a:avLst/>
+          </a:prstGeom>
+          <a:solidFill>
+            <a:srgbClr val="D97706"/>
+          </a:solidFill>
+          <a:ln>
+            <a:noFill/>
+          </a:ln>
+        </p:spPr>
+        <p:style>
+          <a:lnRef idx="1">
+            <a:schemeClr val="accent1"/>
+          </a:lnRef>
+          <a:fillRef idx="3">
+            <a:schemeClr val="accent1"/>
+          </a:fillRef>
+          <a:effectRef idx="2">
+            <a:schemeClr val="accent1"/>
+          </a:effectRef>
+          <a:fontRef idx="minor">
+            <a:schemeClr val="lt1"/>
+          </a:fontRef>
+        </p:style>
+        <p:txBody>
+          <a:bodyPr rtlCol="0" anchor="ctr"/>
+          <a:lstStyle/>
+          <a:p>
+            <a:pPr algn="ctr"/>
+          </a:p>
+        </p:txBody>
+      </p:sp>
+      <p:sp>
+        <p:nvSpPr>
+          <p:cNvPr id="5" name="TextBox 4"/>
           <p:cNvSpPr txBox="1"/>
           <p:nvPr/>
         </p:nvSpPr>
         <p:spPr>
           <a:xfrm>
-            <a:off x="1280160" y="1097280"/>
-            <a:ext cx="10058400" cy="4663440"/>
+            <a:off x="1234440" y="1005840"/>
+            <a:ext cx="10241280" cy="4846320"/>
           </a:xfrm>
           <a:prstGeom prst="rect">
             <a:avLst/>
@@ -3200,70 +3244,165 @@
           <a:p>
             <a:pPr>
               <a:spcAft>
+                <a:spcPts val="1000"/>
+              </a:spcAft>
+              <a:defRPr b="1" sz="1300">
+                <a:solidFill>
+                  <a:srgbClr val="D97706"/>
+                </a:solidFill>
+              </a:defRPr>
+            </a:pPr>
+            <a:r>
+              <a:t>PCCST501 Computer Networks | KTU 2024 Scheme • MODULE 1 • M1.3</a:t>
+            </a:r>
+          </a:p>
+          <a:p>
+            <a:pPr>
+              <a:spcAft>
                 <a:spcPts val="1200"/>
               </a:spcAft>
-              <a:defRPr b="1" sz="1300">
-                <a:solidFill>
-                  <a:srgbClr val="D97706"/>
+              <a:defRPr b="1" sz="3000">
+                <a:solidFill>
+                  <a:srgbClr val="F8FAFC"/>
                 </a:solidFill>
               </a:defRPr>
             </a:pPr>
             <a:r>
-              <a:t>PCCST501 Computer Networks | KTU 2024 Scheme • MODULE 1 • M1.3</a:t>
+              <a:t>Application Layer Paradigms &amp; Requirements</a:t>
             </a:r>
           </a:p>
           <a:p>
             <a:pPr>
               <a:spcAft>
-                <a:spcPts val="1400"/>
+                <a:spcPts val="2400"/>
               </a:spcAft>
-              <a:defRPr b="1" sz="3200">
-                <a:solidFill>
-                  <a:srgbClr val="F8FAFC"/>
+              <a:defRPr sz="1600">
+                <a:solidFill>
+                  <a:srgbClr val="94A3B8"/>
                 </a:solidFill>
               </a:defRPr>
             </a:pPr>
             <a:r>
-              <a:t>Application Layer Paradigms &amp; Services</a:t>
+              <a:t>Client-Server vs P2P Architectures, Transport Service Needs (Integrity, Throughput, Timing, Security), Socket Interface</a:t>
             </a:r>
           </a:p>
           <a:p>
             <a:pPr>
               <a:spcAft>
-                <a:spcPts val="2800"/>
+                <a:spcPts val="300"/>
               </a:spcAft>
-              <a:defRPr sz="1700">
+              <a:defRPr b="1" sz="1350">
+                <a:solidFill>
+                  <a:srgbClr val="E2E8F0"/>
+                </a:solidFill>
+              </a:defRPr>
+            </a:pPr>
+            <a:r>
+              <a:t>Prepared by: Prof. Anju Markose | Assistant Professor, Dept. of CSE | VJCET</a:t>
+            </a:r>
+          </a:p>
+          <a:p>
+            <a:pPr>
+              <a:defRPr sz="1150">
                 <a:solidFill>
                   <a:srgbClr val="94A3B8"/>
                 </a:solidFill>
               </a:defRPr>
             </a:pPr>
             <a:r>
-              <a:t>Client-Server vs Peer-to-Peer (P2P), Transport Service Requirements for Applications</a:t>
-            </a:r>
-          </a:p>
+              <a:t>Viswajyothi College of Engineering and Technology (VJCET), Vazhakulam • KTU S5 CSE</a:t>
+            </a:r>
+          </a:p>
+        </p:txBody>
+      </p:sp>
+      <p:sp>
+        <p:nvSpPr>
+          <p:cNvPr id="6" name="Rounded Rectangle 5"/>
+          <p:cNvSpPr/>
+          <p:nvPr/>
+        </p:nvSpPr>
+        <p:spPr>
+          <a:xfrm>
+            <a:off x="8412480" y="5120640"/>
+            <a:ext cx="3017520" cy="822960"/>
+          </a:xfrm>
+          <a:prstGeom prst="roundRect">
+            <a:avLst/>
+          </a:prstGeom>
+          <a:solidFill>
+            <a:srgbClr val="1E293B"/>
+          </a:solidFill>
+          <a:ln w="12700">
+            <a:solidFill>
+              <a:srgbClr val="0E7490"/>
+            </a:solidFill>
+          </a:ln>
+        </p:spPr>
+        <p:style>
+          <a:lnRef idx="1">
+            <a:schemeClr val="accent1"/>
+          </a:lnRef>
+          <a:fillRef idx="3">
+            <a:schemeClr val="accent1"/>
+          </a:fillRef>
+          <a:effectRef idx="2">
+            <a:schemeClr val="accent1"/>
+          </a:effectRef>
+          <a:fontRef idx="minor">
+            <a:schemeClr val="lt1"/>
+          </a:fontRef>
+        </p:style>
+        <p:txBody>
+          <a:bodyPr rtlCol="0" anchor="ctr"/>
+          <a:lstStyle/>
+          <a:p>
+            <a:pPr algn="ctr"/>
+          </a:p>
+        </p:txBody>
+      </p:sp>
+      <p:sp>
+        <p:nvSpPr>
+          <p:cNvPr id="7" name="TextBox 6"/>
+          <p:cNvSpPr txBox="1"/>
+          <p:nvPr/>
+        </p:nvSpPr>
+        <p:spPr>
+          <a:xfrm>
+            <a:off x="8503920" y="5166360"/>
+            <a:ext cx="2834640" cy="731520"/>
+          </a:xfrm>
+          <a:prstGeom prst="rect">
+            <a:avLst/>
+          </a:prstGeom>
+          <a:noFill/>
+        </p:spPr>
+        <p:txBody>
+          <a:bodyPr wrap="none">
+            <a:spAutoFit/>
+          </a:bodyPr>
+          <a:lstStyle/>
           <a:p>
             <a:pPr>
-              <a:defRPr b="1" sz="1300">
-                <a:solidFill>
-                  <a:srgbClr val="E2E8F0"/>
+              <a:defRPr b="1" sz="1050">
+                <a:solidFill>
+                  <a:srgbClr val="D97706"/>
                 </a:solidFill>
               </a:defRPr>
             </a:pPr>
             <a:r>
-              <a:t>Prepared by: Prof. Anju Markose | Assistant Professor, Dept. of CSE | VJCET</a:t>
+              <a:t>KTU B.Tech Curriculum</a:t>
             </a:r>
           </a:p>
           <a:p>
             <a:pPr>
-              <a:defRPr sz="1100">
-                <a:solidFill>
-                  <a:srgbClr val="94A3B8"/>
+              <a:defRPr sz="950">
+                <a:solidFill>
+                  <a:srgbClr val="F8FAFC"/>
                 </a:solidFill>
               </a:defRPr>
             </a:pPr>
             <a:r>
-              <a:t>Viswajyothi College of Engineering and Technology (VJCET), Vazhakulam</a:t>
+              <a:t>Official Classroom Slide Deck</a:t>
             </a:r>
           </a:p>
         </p:txBody>
@@ -3395,14 +3534,14 @@
           <a:lstStyle/>
           <a:p>
             <a:pPr>
-              <a:defRPr b="1" sz="2300">
+              <a:defRPr b="1" sz="2200">
                 <a:solidFill>
                   <a:srgbClr val="F8FAFC"/>
                 </a:solidFill>
               </a:defRPr>
             </a:pPr>
             <a:r>
-              <a:t>1.3.1 Application Architecture Paradigms</a:t>
+              <a:t>1.3.1 Application Paradigms: Client-Server vs P2P</a:t>
             </a:r>
           </a:p>
         </p:txBody>
@@ -3437,7 +3576,7 @@
               </a:defRPr>
             </a:pPr>
             <a:r>
-              <a:t>M1.3 APP PARADIGMS</a:t>
+              <a:t>M1.3 APPLICATION PARADIGMS</a:t>
             </a:r>
           </a:p>
         </p:txBody>
@@ -3450,18 +3589,18 @@
         </p:nvSpPr>
         <p:spPr>
           <a:xfrm>
-            <a:off x="731520" y="1280160"/>
-            <a:ext cx="5212080" cy="4846320"/>
+            <a:off x="731520" y="1234440"/>
+            <a:ext cx="5212080" cy="4892040"/>
           </a:xfrm>
           <a:prstGeom prst="roundRect">
             <a:avLst/>
           </a:prstGeom>
           <a:solidFill>
-            <a:srgbClr val="F1F5F9"/>
+            <a:srgbClr val="F8FAFC"/>
           </a:solidFill>
           <a:ln w="19050">
             <a:solidFill>
-              <a:srgbClr val="0E7490"/>
+              <a:srgbClr val="0F1E4A"/>
             </a:solidFill>
           </a:ln>
         </p:spPr>
@@ -3495,7 +3634,7 @@
         </p:nvSpPr>
         <p:spPr>
           <a:xfrm>
-            <a:off x="914400" y="1417320"/>
+            <a:off x="914400" y="1371600"/>
             <a:ext cx="4846320" cy="4572000"/>
           </a:xfrm>
           <a:prstGeom prst="rect">
@@ -3511,9 +3650,9 @@
           <a:p>
             <a:pPr>
               <a:spcAft>
-                <a:spcPts val="1200"/>
+                <a:spcPts val="1000"/>
               </a:spcAft>
-              <a:defRPr b="1" sz="1600">
+              <a:defRPr b="1" sz="1550">
                 <a:solidFill>
                   <a:srgbClr val="0F1E4A"/>
                 </a:solidFill>
@@ -3526,76 +3665,76 @@
           <a:p>
             <a:pPr>
               <a:spcAft>
-                <a:spcPts val="600"/>
+                <a:spcPts val="500"/>
               </a:spcAft>
-              <a:defRPr sz="1250">
-                <a:solidFill>
-                  <a:srgbClr val="1E293B"/>
+              <a:defRPr sz="1200">
+                <a:solidFill>
+                  <a:srgbClr val="0F172A"/>
                 </a:solidFill>
               </a:defRPr>
             </a:pPr>
             <a:r>
-              <a:t>• Server Host: Always-on host with permanent, well-known IP address</a:t>
+              <a:t>• Centralized Server: Always-on host with fixed, well-known IP address</a:t>
             </a:r>
           </a:p>
           <a:p>
             <a:pPr>
               <a:spcAft>
-                <a:spcPts val="600"/>
+                <a:spcPts val="500"/>
               </a:spcAft>
-              <a:defRPr sz="1250">
-                <a:solidFill>
-                  <a:srgbClr val="1E293B"/>
+              <a:defRPr sz="1200">
+                <a:solidFill>
+                  <a:srgbClr val="0F172A"/>
                 </a:solidFill>
               </a:defRPr>
             </a:pPr>
             <a:r>
-              <a:t>• Client Hosts: Communicate with server; intermittent connections; dynamic IPs</a:t>
+              <a:t>• Client Behavior: Initiate requests on demand; clients do not speak to each other</a:t>
             </a:r>
           </a:p>
           <a:p>
             <a:pPr>
               <a:spcAft>
-                <a:spcPts val="600"/>
+                <a:spcPts val="500"/>
               </a:spcAft>
-              <a:defRPr sz="1250">
-                <a:solidFill>
-                  <a:srgbClr val="1E293B"/>
+              <a:defRPr sz="1200">
+                <a:solidFill>
+                  <a:srgbClr val="0F172A"/>
                 </a:solidFill>
               </a:defRPr>
             </a:pPr>
             <a:r>
-              <a:t>• Scalability: Server can become bottleneck; requires data centers / load balancers</a:t>
+              <a:t>• Scalability Limit: Server upload capacity bottlenecks under massive simultaneous loads ($D_{CS} = \max\{N \cdot F / u_s, F / d_i\}$)</a:t>
             </a:r>
           </a:p>
           <a:p>
             <a:pPr>
               <a:spcAft>
-                <a:spcPts val="600"/>
+                <a:spcPts val="500"/>
               </a:spcAft>
-              <a:defRPr sz="1250">
-                <a:solidFill>
-                  <a:srgbClr val="1E293B"/>
+              <a:defRPr sz="1200">
+                <a:solidFill>
+                  <a:srgbClr val="0F172A"/>
                 </a:solidFill>
               </a:defRPr>
             </a:pPr>
             <a:r>
-              <a:t>• Control: Centralized control, security, and authentication</a:t>
+              <a:t>• Infrastructure Cost: Requires massive data centers, load balancers, and CDN caching</a:t>
             </a:r>
           </a:p>
           <a:p>
             <a:pPr>
               <a:spcAft>
-                <a:spcPts val="600"/>
+                <a:spcPts val="500"/>
               </a:spcAft>
-              <a:defRPr sz="1250">
-                <a:solidFill>
-                  <a:srgbClr val="1E293B"/>
+              <a:defRPr sz="1200">
+                <a:solidFill>
+                  <a:srgbClr val="0F172A"/>
                 </a:solidFill>
               </a:defRPr>
             </a:pPr>
             <a:r>
-              <a:t>• Examples: Web (HTTP), Email (SMTP/IMAP), File Transfer (FTP)</a:t>
+              <a:t>• Examples: Web (HTTP), Email (SMTP/IMAP), Remote Login (SSH)</a:t>
             </a:r>
           </a:p>
         </p:txBody>
@@ -3608,8 +3747,8 @@
         </p:nvSpPr>
         <p:spPr>
           <a:xfrm>
-            <a:off x="6309360" y="1280160"/>
-            <a:ext cx="5212080" cy="4846320"/>
+            <a:off x="6309360" y="1234440"/>
+            <a:ext cx="5212080" cy="4892040"/>
           </a:xfrm>
           <a:prstGeom prst="roundRect">
             <a:avLst/>
@@ -3619,7 +3758,7 @@
           </a:solidFill>
           <a:ln w="19050">
             <a:solidFill>
-              <a:srgbClr val="0F1E4A"/>
+              <a:srgbClr val="0E7490"/>
             </a:solidFill>
           </a:ln>
         </p:spPr>
@@ -3653,7 +3792,7 @@
         </p:nvSpPr>
         <p:spPr>
           <a:xfrm>
-            <a:off x="6492240" y="1417320"/>
+            <a:off x="6492240" y="1371600"/>
             <a:ext cx="4846320" cy="4572000"/>
           </a:xfrm>
           <a:prstGeom prst="rect">
@@ -3669,9 +3808,9 @@
           <a:p>
             <a:pPr>
               <a:spcAft>
-                <a:spcPts val="1200"/>
+                <a:spcPts val="1000"/>
               </a:spcAft>
-              <a:defRPr b="1" sz="1600">
+              <a:defRPr b="1" sz="1550">
                 <a:solidFill>
                   <a:srgbClr val="0E7490"/>
                 </a:solidFill>
@@ -3684,76 +3823,76 @@
           <a:p>
             <a:pPr>
               <a:spcAft>
-                <a:spcPts val="600"/>
+                <a:spcPts val="500"/>
               </a:spcAft>
-              <a:defRPr sz="1250">
-                <a:solidFill>
-                  <a:srgbClr val="1E293B"/>
+              <a:defRPr sz="1200">
+                <a:solidFill>
+                  <a:srgbClr val="0F172A"/>
                 </a:solidFill>
               </a:defRPr>
             </a:pPr>
             <a:r>
-              <a:t>• Peers: Arbitrary end systems communicate directly without dedicated server</a:t>
+              <a:t>• Decentralized Peers: Arbitrary end systems communicate directly without dedicated central servers</a:t>
             </a:r>
           </a:p>
           <a:p>
             <a:pPr>
               <a:spcAft>
-                <a:spcPts val="600"/>
+                <a:spcPts val="500"/>
               </a:spcAft>
-              <a:defRPr sz="1250">
-                <a:solidFill>
-                  <a:srgbClr val="1E293B"/>
+              <a:defRPr sz="1200">
+                <a:solidFill>
+                  <a:srgbClr val="0F172A"/>
                 </a:solidFill>
               </a:defRPr>
             </a:pPr>
             <a:r>
-              <a:t>• Self-Scalability: New peers bring service capacity as well as demand</a:t>
+              <a:t>• Self-Scalability: Peers are both consumers (downloaders) and producers (uploaders) of data</a:t>
             </a:r>
           </a:p>
           <a:p>
             <a:pPr>
               <a:spcAft>
-                <a:spcPts val="600"/>
+                <a:spcPts val="500"/>
               </a:spcAft>
-              <a:defRPr sz="1250">
-                <a:solidFill>
-                  <a:srgbClr val="1E293B"/>
+              <a:defRPr sz="1200">
+                <a:solidFill>
+                  <a:srgbClr val="0F172A"/>
                 </a:solidFill>
               </a:defRPr>
             </a:pPr>
             <a:r>
-              <a:t>• Decentralization: No single point of failure; resilient against server outages</a:t>
+              <a:t>• Scalability Formula: Distribution time grows logarithmically: $D_{P2P} = \max\{F / u_s, F / d_{min}, N \cdot F / (u_s + \sum u_i)\}$</a:t>
             </a:r>
           </a:p>
           <a:p>
             <a:pPr>
               <a:spcAft>
-                <a:spcPts val="600"/>
+                <a:spcPts val="500"/>
               </a:spcAft>
-              <a:defRPr sz="1250">
-                <a:solidFill>
-                  <a:srgbClr val="1E293B"/>
+              <a:defRPr sz="1200">
+                <a:solidFill>
+                  <a:srgbClr val="0F172A"/>
                 </a:solidFill>
               </a:defRPr>
             </a:pPr>
             <a:r>
-              <a:t>• Management: Complex churn handling (peers join and leave arbitrarily)</a:t>
+              <a:t>• Challenges: Churn (peers join/leave dynamically), security, ISP asymmetric bandwidth</a:t>
             </a:r>
           </a:p>
           <a:p>
             <a:pPr>
               <a:spcAft>
-                <a:spcPts val="600"/>
+                <a:spcPts val="500"/>
               </a:spcAft>
-              <a:defRPr sz="1250">
-                <a:solidFill>
-                  <a:srgbClr val="1E293B"/>
+              <a:defRPr sz="1200">
+                <a:solidFill>
+                  <a:srgbClr val="0F172A"/>
                 </a:solidFill>
               </a:defRPr>
             </a:pPr>
             <a:r>
-              <a:t>• Examples: BitTorrent, Gnutella, Blockchain networks</a:t>
+              <a:t>• Examples: BitTorrent, IPFS, Blockchain, Skype (original)</a:t>
             </a:r>
           </a:p>
         </p:txBody>
@@ -3766,8 +3905,8 @@
         </p:nvSpPr>
         <p:spPr>
           <a:xfrm>
-            <a:off x="731520" y="6309360"/>
-            <a:ext cx="10789920" cy="365760"/>
+            <a:off x="731520" y="6327648"/>
+            <a:ext cx="10789920" cy="320040"/>
           </a:xfrm>
           <a:prstGeom prst="rect">
             <a:avLst/>
@@ -3789,6 +3928,41 @@
             </a:pPr>
             <a:r>
               <a:t>PCCST501 Computer Networks | KTU 2024 Scheme | Prof. Anju Markose | Assistant Professor, Dept. of CSE | VJCET</a:t>
+            </a:r>
+          </a:p>
+        </p:txBody>
+      </p:sp>
+      <p:sp>
+        <p:nvSpPr>
+          <p:cNvPr id="11" name="TextBox 10"/>
+          <p:cNvSpPr txBox="1"/>
+          <p:nvPr/>
+        </p:nvSpPr>
+        <p:spPr>
+          <a:xfrm>
+            <a:off x="6858000" y="6327648"/>
+            <a:ext cx="4572000" cy="320040"/>
+          </a:xfrm>
+          <a:prstGeom prst="rect">
+            <a:avLst/>
+          </a:prstGeom>
+          <a:noFill/>
+        </p:spPr>
+        <p:txBody>
+          <a:bodyPr wrap="none">
+            <a:spAutoFit/>
+          </a:bodyPr>
+          <a:lstStyle/>
+          <a:p>
+            <a:pPr algn="r">
+              <a:defRPr sz="950">
+                <a:solidFill>
+                  <a:srgbClr val="64748B"/>
+                </a:solidFill>
+              </a:defRPr>
+            </a:pPr>
+            <a:r>
+              <a:t>Dept. of CSE, VJCET</a:t>
             </a:r>
           </a:p>
         </p:txBody>
@@ -3920,14 +4094,14 @@
           <a:lstStyle/>
           <a:p>
             <a:pPr>
-              <a:defRPr b="1" sz="2300">
+              <a:defRPr b="1" sz="2200">
                 <a:solidFill>
                   <a:srgbClr val="F8FAFC"/>
                 </a:solidFill>
               </a:defRPr>
             </a:pPr>
             <a:r>
-              <a:t>1.3.2 Transport Services Required by Applications</a:t>
+              <a:t>1.3.2 Transport Layer Service Requirements for Applications</a:t>
             </a:r>
           </a:p>
         </p:txBody>
@@ -3975,7 +4149,7 @@
         </p:nvSpPr>
         <p:spPr>
           <a:xfrm>
-            <a:off x="731520" y="1280160"/>
+            <a:off x="731520" y="1234440"/>
             <a:ext cx="6858000" cy="4937760"/>
           </a:xfrm>
           <a:prstGeom prst="rect">
@@ -3993,29 +4167,29 @@
               <a:spcAft>
                 <a:spcPts val="200"/>
               </a:spcAft>
-              <a:defRPr b="1" sz="1500">
+              <a:defRPr b="1" sz="1450">
                 <a:solidFill>
                   <a:srgbClr val="0F1E4A"/>
                 </a:solidFill>
               </a:defRPr>
             </a:pPr>
             <a:r>
-              <a:t>• Reliable Data Transfer</a:t>
+              <a:t>• Data Integrity / Reliability</a:t>
             </a:r>
           </a:p>
           <a:p>
             <a:pPr>
               <a:spcAft>
-                <a:spcPts val="800"/>
+                <a:spcPts val="700"/>
               </a:spcAft>
-              <a:defRPr sz="1300">
-                <a:solidFill>
-                  <a:srgbClr val="1E293B"/>
+              <a:defRPr sz="1250">
+                <a:solidFill>
+                  <a:srgbClr val="0F172A"/>
                 </a:solidFill>
               </a:defRPr>
             </a:pPr>
             <a:r>
-              <a:t>   Financial, web, and email apps require 100% loss-free transfer (TCP). Loss-tolerant audio/video can accept minor loss (UDP).</a:t>
+              <a:t>   Loss-intolerant applications (Web documents, file transfer, email, banking) require 100% reliable transport (TCP). Loss-tolerant applications (audio/video streaming, VoIP) can tolerate slight packet loss (UDP).</a:t>
             </a:r>
           </a:p>
           <a:p>
@@ -4023,29 +4197,29 @@
               <a:spcAft>
                 <a:spcPts val="200"/>
               </a:spcAft>
-              <a:defRPr b="1" sz="1500">
+              <a:defRPr b="1" sz="1450">
                 <a:solidFill>
                   <a:srgbClr val="0F1E4A"/>
                 </a:solidFill>
               </a:defRPr>
             </a:pPr>
             <a:r>
-              <a:t>• Throughput / Bandwidth Guarantees</a:t>
+              <a:t>• Throughput Guarantees</a:t>
             </a:r>
           </a:p>
           <a:p>
             <a:pPr>
               <a:spcAft>
-                <a:spcPts val="800"/>
+                <a:spcPts val="700"/>
               </a:spcAft>
-              <a:defRPr sz="1300">
-                <a:solidFill>
-                  <a:srgbClr val="1E293B"/>
+              <a:defRPr sz="1250">
+                <a:solidFill>
+                  <a:srgbClr val="0F172A"/>
                 </a:solidFill>
               </a:defRPr>
             </a:pPr>
             <a:r>
-              <a:t>   Bandwidth-sensitive apps (VoIP, 4K video) need minimum throughput guarantees. Elastic apps adapt to available bandwidth.</a:t>
+              <a:t>   Bandwidth-sensitive applications (HD video streaming, real-time conferencing) need minimum throughput guarantees. Elastic applications (Email, Web, FTP) make use of whatever bandwidth is available.</a:t>
             </a:r>
           </a:p>
           <a:p>
@@ -4053,29 +4227,29 @@
               <a:spcAft>
                 <a:spcPts val="200"/>
               </a:spcAft>
-              <a:defRPr b="1" sz="1500">
+              <a:defRPr b="1" sz="1450">
                 <a:solidFill>
                   <a:srgbClr val="0F1E4A"/>
                 </a:solidFill>
               </a:defRPr>
             </a:pPr>
             <a:r>
-              <a:t>• Timing &amp; Latency Constraints</a:t>
+              <a:t>• Timing / Latency Guarantees</a:t>
             </a:r>
           </a:p>
           <a:p>
             <a:pPr>
               <a:spcAft>
-                <a:spcPts val="800"/>
+                <a:spcPts val="700"/>
               </a:spcAft>
-              <a:defRPr sz="1300">
-                <a:solidFill>
-                  <a:srgbClr val="1E293B"/>
+              <a:defRPr sz="1250">
+                <a:solidFill>
+                  <a:srgbClr val="0F172A"/>
                 </a:solidFill>
               </a:defRPr>
             </a:pPr>
             <a:r>
-              <a:t>   Interactive games and video conferencing require tight bounds on end-to-end delay (e.g. &lt; 150ms).</a:t>
+              <a:t>   Interactive gaming and VoIP require tight upper bounds on end-to-end delay (e.g., &lt; 150 ms) to prevent human-perceptible lag.</a:t>
             </a:r>
           </a:p>
           <a:p>
@@ -4083,7 +4257,7 @@
               <a:spcAft>
                 <a:spcPts val="200"/>
               </a:spcAft>
-              <a:defRPr b="1" sz="1500">
+              <a:defRPr b="1" sz="1450">
                 <a:solidFill>
                   <a:srgbClr val="0F1E4A"/>
                 </a:solidFill>
@@ -4096,16 +4270,16 @@
           <a:p>
             <a:pPr>
               <a:spcAft>
-                <a:spcPts val="800"/>
+                <a:spcPts val="700"/>
               </a:spcAft>
-              <a:defRPr sz="1300">
-                <a:solidFill>
-                  <a:srgbClr val="1E293B"/>
+              <a:defRPr sz="1250">
+                <a:solidFill>
+                  <a:srgbClr val="0F172A"/>
                 </a:solidFill>
               </a:defRPr>
             </a:pPr>
             <a:r>
-              <a:t>   Confidentiality, data integrity, and endpoint authentication provided by Transport Layer Security (TLS/HTTPS).</a:t>
+              <a:t>   Application data privacy, server authentication, and message integrity provided via TLS (Transport Layer Security) running on top of TCP (e.g., HTTPS, SMTPS).</a:t>
             </a:r>
           </a:p>
           <a:p>
@@ -4113,29 +4287,29 @@
               <a:spcAft>
                 <a:spcPts val="200"/>
               </a:spcAft>
-              <a:defRPr b="1" sz="1500">
+              <a:defRPr b="1" sz="1450">
                 <a:solidFill>
                   <a:srgbClr val="0F1E4A"/>
                 </a:solidFill>
               </a:defRPr>
             </a:pPr>
             <a:r>
-              <a:t>• Socket Abstraction</a:t>
+              <a:t>• Transport Choice Mapping</a:t>
             </a:r>
           </a:p>
           <a:p>
             <a:pPr>
               <a:spcAft>
-                <a:spcPts val="800"/>
+                <a:spcPts val="700"/>
               </a:spcAft>
-              <a:defRPr sz="1300">
-                <a:solidFill>
-                  <a:srgbClr val="1E293B"/>
+              <a:defRPr sz="1250">
+                <a:solidFill>
+                  <a:srgbClr val="0F172A"/>
                 </a:solidFill>
               </a:defRPr>
             </a:pPr>
             <a:r>
-              <a:t>   The software interface through which application processes send and receive data over the network stack.</a:t>
+              <a:t>   TCP: HTTP/1.1 (80), HTTPS (443), FTP (20/21), SMTP (25), SSH (22). UDP: DNS (53), SNMP (161), RTP/RTSP, DHCP (67/68), QUIC/HTTP3 (443).</a:t>
             </a:r>
           </a:p>
         </p:txBody>
@@ -4148,14 +4322,14 @@
         </p:nvSpPr>
         <p:spPr>
           <a:xfrm>
-            <a:off x="7955279" y="1280160"/>
-            <a:ext cx="3566160" cy="4846320"/>
+            <a:off x="7955279" y="1234440"/>
+            <a:ext cx="3566160" cy="4892040"/>
           </a:xfrm>
           <a:prstGeom prst="roundRect">
             <a:avLst/>
           </a:prstGeom>
           <a:solidFill>
-            <a:srgbClr val="F1F5F9"/>
+            <a:srgbClr val="F8FAFC"/>
           </a:solidFill>
           <a:ln w="19050">
             <a:solidFill>
@@ -4193,7 +4367,7 @@
         </p:nvSpPr>
         <p:spPr>
           <a:xfrm>
-            <a:off x="8138160" y="1417320"/>
+            <a:off x="8138160" y="1371600"/>
             <a:ext cx="3200400" cy="4572000"/>
           </a:xfrm>
           <a:prstGeom prst="rect">
@@ -4218,7 +4392,7 @@
               </a:defRPr>
             </a:pPr>
             <a:r>
-              <a:t>Protocol Matching</a:t>
+              <a:t>Service Classification</a:t>
             </a:r>
           </a:p>
           <a:p>
@@ -4228,12 +4402,12 @@
               </a:spcAft>
               <a:defRPr sz="1200">
                 <a:solidFill>
-                  <a:srgbClr val="1E293B"/>
+                  <a:srgbClr val="0F172A"/>
                 </a:solidFill>
               </a:defRPr>
             </a:pPr>
             <a:r>
-              <a:t>→ Web (HTTP): TCP (Port 80/443)</a:t>
+              <a:t>→ Reliability: TCP (Strict) vs UDP (Loss-tolerant)</a:t>
             </a:r>
           </a:p>
           <a:p>
@@ -4243,12 +4417,12 @@
               </a:spcAft>
               <a:defRPr sz="1200">
                 <a:solidFill>
-                  <a:srgbClr val="1E293B"/>
+                  <a:srgbClr val="0F172A"/>
                 </a:solidFill>
               </a:defRPr>
             </a:pPr>
             <a:r>
-              <a:t>→ Email (SMTP): TCP (Port 25/587)</a:t>
+              <a:t>→ Timing: Sensitive (VoIP) vs Elastic (Email/Web)</a:t>
             </a:r>
           </a:p>
           <a:p>
@@ -4258,12 +4432,12 @@
               </a:spcAft>
               <a:defRPr sz="1200">
                 <a:solidFill>
-                  <a:srgbClr val="1E293B"/>
+                  <a:srgbClr val="0F172A"/>
                 </a:solidFill>
               </a:defRPr>
             </a:pPr>
             <a:r>
-              <a:t>→ DNS: UDP (Port 53) [Low latency]</a:t>
+              <a:t>→ Security: TLS/SSL cryptographic wrapper</a:t>
             </a:r>
           </a:p>
           <a:p>
@@ -4273,12 +4447,467 @@
               </a:spcAft>
               <a:defRPr sz="1200">
                 <a:solidFill>
-                  <a:srgbClr val="1E293B"/>
+                  <a:srgbClr val="0F172A"/>
                 </a:solidFill>
               </a:defRPr>
             </a:pPr>
             <a:r>
-              <a:t>→ Streaming: UDP / RTP (or DASH/TCP)</a:t>
+              <a:t>→ Multiplexing: 16-bit Port numbers</a:t>
+            </a:r>
+          </a:p>
+        </p:txBody>
+      </p:sp>
+      <p:sp>
+        <p:nvSpPr>
+          <p:cNvPr id="9" name="TextBox 8"/>
+          <p:cNvSpPr txBox="1"/>
+          <p:nvPr/>
+        </p:nvSpPr>
+        <p:spPr>
+          <a:xfrm>
+            <a:off x="731520" y="6327648"/>
+            <a:ext cx="10789920" cy="320040"/>
+          </a:xfrm>
+          <a:prstGeom prst="rect">
+            <a:avLst/>
+          </a:prstGeom>
+          <a:noFill/>
+        </p:spPr>
+        <p:txBody>
+          <a:bodyPr wrap="none">
+            <a:spAutoFit/>
+          </a:bodyPr>
+          <a:lstStyle/>
+          <a:p>
+            <a:pPr>
+              <a:defRPr sz="950">
+                <a:solidFill>
+                  <a:srgbClr val="64748B"/>
+                </a:solidFill>
+              </a:defRPr>
+            </a:pPr>
+            <a:r>
+              <a:t>PCCST501 Computer Networks | KTU 2024 Scheme | Prof. Anju Markose | Assistant Professor, Dept. of CSE | VJCET</a:t>
+            </a:r>
+          </a:p>
+        </p:txBody>
+      </p:sp>
+      <p:sp>
+        <p:nvSpPr>
+          <p:cNvPr id="10" name="TextBox 9"/>
+          <p:cNvSpPr txBox="1"/>
+          <p:nvPr/>
+        </p:nvSpPr>
+        <p:spPr>
+          <a:xfrm>
+            <a:off x="6858000" y="6327648"/>
+            <a:ext cx="4572000" cy="320040"/>
+          </a:xfrm>
+          <a:prstGeom prst="rect">
+            <a:avLst/>
+          </a:prstGeom>
+          <a:noFill/>
+        </p:spPr>
+        <p:txBody>
+          <a:bodyPr wrap="none">
+            <a:spAutoFit/>
+          </a:bodyPr>
+          <a:lstStyle/>
+          <a:p>
+            <a:pPr algn="r">
+              <a:defRPr sz="950">
+                <a:solidFill>
+                  <a:srgbClr val="64748B"/>
+                </a:solidFill>
+              </a:defRPr>
+            </a:pPr>
+            <a:r>
+              <a:t>Dept. of CSE, VJCET</a:t>
+            </a:r>
+          </a:p>
+        </p:txBody>
+      </p:sp>
+    </p:spTree>
+  </p:cSld>
+  <p:clrMapOvr>
+    <a:masterClrMapping/>
+  </p:clrMapOvr>
+</p:sld>
+</file>
+
+<file path=ppt/slides/slide4.xml><?xml version="1.0" encoding="utf-8"?>
+<p:sld xmlns:a="http://schemas.openxmlformats.org/drawingml/2006/main" xmlns:p="http://schemas.openxmlformats.org/presentationml/2006/main" xmlns:r="http://schemas.openxmlformats.org/officeDocument/2006/relationships">
+  <p:cSld>
+    <p:spTree>
+      <p:nvGrpSpPr>
+        <p:cNvPr id="1" name=""/>
+        <p:cNvGrpSpPr/>
+        <p:nvPr/>
+      </p:nvGrpSpPr>
+      <p:grpSpPr/>
+      <p:sp>
+        <p:nvSpPr>
+          <p:cNvPr id="2" name="Rectangle 1"/>
+          <p:cNvSpPr/>
+          <p:nvPr/>
+        </p:nvSpPr>
+        <p:spPr>
+          <a:xfrm>
+            <a:off x="0" y="0"/>
+            <a:ext cx="12191695" cy="1005840"/>
+          </a:xfrm>
+          <a:prstGeom prst="rect">
+            <a:avLst/>
+          </a:prstGeom>
+          <a:solidFill>
+            <a:srgbClr val="0F1E4A"/>
+          </a:solidFill>
+          <a:ln>
+            <a:noFill/>
+          </a:ln>
+        </p:spPr>
+        <p:style>
+          <a:lnRef idx="1">
+            <a:schemeClr val="accent1"/>
+          </a:lnRef>
+          <a:fillRef idx="3">
+            <a:schemeClr val="accent1"/>
+          </a:fillRef>
+          <a:effectRef idx="2">
+            <a:schemeClr val="accent1"/>
+          </a:effectRef>
+          <a:fontRef idx="minor">
+            <a:schemeClr val="lt1"/>
+          </a:fontRef>
+        </p:style>
+        <p:txBody>
+          <a:bodyPr rtlCol="0" anchor="ctr"/>
+          <a:lstStyle/>
+          <a:p>
+            <a:pPr algn="ctr"/>
+          </a:p>
+        </p:txBody>
+      </p:sp>
+      <p:sp>
+        <p:nvSpPr>
+          <p:cNvPr id="3" name="Rectangle 2"/>
+          <p:cNvSpPr/>
+          <p:nvPr/>
+        </p:nvSpPr>
+        <p:spPr>
+          <a:xfrm>
+            <a:off x="0" y="969264"/>
+            <a:ext cx="12191695" cy="36576"/>
+          </a:xfrm>
+          <a:prstGeom prst="rect">
+            <a:avLst/>
+          </a:prstGeom>
+          <a:solidFill>
+            <a:srgbClr val="D97706"/>
+          </a:solidFill>
+          <a:ln>
+            <a:noFill/>
+          </a:ln>
+        </p:spPr>
+        <p:style>
+          <a:lnRef idx="1">
+            <a:schemeClr val="accent1"/>
+          </a:lnRef>
+          <a:fillRef idx="3">
+            <a:schemeClr val="accent1"/>
+          </a:fillRef>
+          <a:effectRef idx="2">
+            <a:schemeClr val="accent1"/>
+          </a:effectRef>
+          <a:fontRef idx="minor">
+            <a:schemeClr val="lt1"/>
+          </a:fontRef>
+        </p:style>
+        <p:txBody>
+          <a:bodyPr rtlCol="0" anchor="ctr"/>
+          <a:lstStyle/>
+          <a:p>
+            <a:pPr algn="ctr"/>
+          </a:p>
+        </p:txBody>
+      </p:sp>
+      <p:sp>
+        <p:nvSpPr>
+          <p:cNvPr id="4" name="TextBox 3"/>
+          <p:cNvSpPr txBox="1"/>
+          <p:nvPr/>
+        </p:nvSpPr>
+        <p:spPr>
+          <a:xfrm>
+            <a:off x="731520" y="164592"/>
+            <a:ext cx="8412480" cy="685800"/>
+          </a:xfrm>
+          <a:prstGeom prst="rect">
+            <a:avLst/>
+          </a:prstGeom>
+          <a:noFill/>
+        </p:spPr>
+        <p:txBody>
+          <a:bodyPr wrap="none">
+            <a:spAutoFit/>
+          </a:bodyPr>
+          <a:lstStyle/>
+          <a:p>
+            <a:pPr>
+              <a:defRPr b="1" sz="2100">
+                <a:solidFill>
+                  <a:srgbClr val="F8FAFC"/>
+                </a:solidFill>
+              </a:defRPr>
+            </a:pPr>
+            <a:r>
+              <a:t>🎯 Exam Booster &amp; Review: Application Paradigms &amp; Requirements</a:t>
+            </a:r>
+          </a:p>
+        </p:txBody>
+      </p:sp>
+      <p:sp>
+        <p:nvSpPr>
+          <p:cNvPr id="5" name="TextBox 4"/>
+          <p:cNvSpPr txBox="1"/>
+          <p:nvPr/>
+        </p:nvSpPr>
+        <p:spPr>
+          <a:xfrm>
+            <a:off x="8229600" y="164592"/>
+            <a:ext cx="3291840" cy="685800"/>
+          </a:xfrm>
+          <a:prstGeom prst="rect">
+            <a:avLst/>
+          </a:prstGeom>
+          <a:noFill/>
+        </p:spPr>
+        <p:txBody>
+          <a:bodyPr wrap="none">
+            <a:spAutoFit/>
+          </a:bodyPr>
+          <a:lstStyle/>
+          <a:p>
+            <a:pPr algn="r">
+              <a:defRPr b="1" sz="1300">
+                <a:solidFill>
+                  <a:srgbClr val="D97706"/>
+                </a:solidFill>
+              </a:defRPr>
+            </a:pPr>
+            <a:r>
+              <a:t>M1.3</a:t>
+            </a:r>
+          </a:p>
+        </p:txBody>
+      </p:sp>
+      <p:sp>
+        <p:nvSpPr>
+          <p:cNvPr id="6" name="Rounded Rectangle 5"/>
+          <p:cNvSpPr/>
+          <p:nvPr/>
+        </p:nvSpPr>
+        <p:spPr>
+          <a:xfrm>
+            <a:off x="731520" y="1234440"/>
+            <a:ext cx="5303520" cy="4892040"/>
+          </a:xfrm>
+          <a:prstGeom prst="roundRect">
+            <a:avLst/>
+          </a:prstGeom>
+          <a:solidFill>
+            <a:srgbClr val="FEF3C7"/>
+          </a:solidFill>
+          <a:ln w="19050">
+            <a:solidFill>
+              <a:srgbClr val="D97706"/>
+            </a:solidFill>
+          </a:ln>
+        </p:spPr>
+        <p:style>
+          <a:lnRef idx="1">
+            <a:schemeClr val="accent1"/>
+          </a:lnRef>
+          <a:fillRef idx="3">
+            <a:schemeClr val="accent1"/>
+          </a:fillRef>
+          <a:effectRef idx="2">
+            <a:schemeClr val="accent1"/>
+          </a:effectRef>
+          <a:fontRef idx="minor">
+            <a:schemeClr val="lt1"/>
+          </a:fontRef>
+        </p:style>
+        <p:txBody>
+          <a:bodyPr rtlCol="0" anchor="ctr"/>
+          <a:lstStyle/>
+          <a:p>
+            <a:pPr algn="ctr"/>
+          </a:p>
+        </p:txBody>
+      </p:sp>
+      <p:sp>
+        <p:nvSpPr>
+          <p:cNvPr id="7" name="TextBox 6"/>
+          <p:cNvSpPr txBox="1"/>
+          <p:nvPr/>
+        </p:nvSpPr>
+        <p:spPr>
+          <a:xfrm>
+            <a:off x="914400" y="1371600"/>
+            <a:ext cx="4937760" cy="4572000"/>
+          </a:xfrm>
+          <a:prstGeom prst="rect">
+            <a:avLst/>
+          </a:prstGeom>
+          <a:noFill/>
+        </p:spPr>
+        <p:txBody>
+          <a:bodyPr wrap="square">
+            <a:spAutoFit/>
+          </a:bodyPr>
+          <a:lstStyle/>
+          <a:p>
+            <a:pPr>
+              <a:spcAft>
+                <a:spcPts val="1000"/>
+              </a:spcAft>
+              <a:defRPr b="1" sz="1450">
+                <a:solidFill>
+                  <a:srgbClr val="D97706"/>
+                </a:solidFill>
+              </a:defRPr>
+            </a:pPr>
+            <a:r>
+              <a:t>📚 KTU High-Yield Questions (K2 Understand)</a:t>
+            </a:r>
+          </a:p>
+          <a:p>
+            <a:pPr>
+              <a:spcAft>
+                <a:spcPts val="700"/>
+              </a:spcAft>
+              <a:defRPr sz="1200">
+                <a:solidFill>
+                  <a:srgbClr val="0F172A"/>
+                </a:solidFill>
+              </a:defRPr>
+            </a:pPr>
+            <a:r>
+              <a:t>Q: Differentiate between Client-Server and Peer-to-Peer network paradigms with real-world examples. (6 Marks)</a:t>
+            </a:r>
+          </a:p>
+          <a:p>
+            <a:pPr>
+              <a:spcAft>
+                <a:spcPts val="700"/>
+              </a:spcAft>
+              <a:defRPr sz="1200">
+                <a:solidFill>
+                  <a:srgbClr val="0F172A"/>
+                </a:solidFill>
+              </a:defRPr>
+            </a:pPr>
+            <a:r>
+              <a:t>Q: Identify the transport service requirements (loss, throughput, timing, security) for HTTP, VoIP, DNS, and FTP. (6 Marks)</a:t>
+            </a:r>
+          </a:p>
+          <a:p>
+            <a:pPr>
+              <a:spcAft>
+                <a:spcPts val="700"/>
+              </a:spcAft>
+              <a:defRPr sz="1200">
+                <a:solidFill>
+                  <a:srgbClr val="0F172A"/>
+                </a:solidFill>
+              </a:defRPr>
+            </a:pPr>
+            <a:r>
+              <a:t>Q: Explain how the socket interface acts as an API bridge between application-layer user processes and kernel transport protocols. (5 Marks)</a:t>
+            </a:r>
+          </a:p>
+        </p:txBody>
+      </p:sp>
+      <p:sp>
+        <p:nvSpPr>
+          <p:cNvPr id="8" name="Rounded Rectangle 7"/>
+          <p:cNvSpPr/>
+          <p:nvPr/>
+        </p:nvSpPr>
+        <p:spPr>
+          <a:xfrm>
+            <a:off x="6309360" y="1234440"/>
+            <a:ext cx="5212080" cy="4892040"/>
+          </a:xfrm>
+          <a:prstGeom prst="roundRect">
+            <a:avLst/>
+          </a:prstGeom>
+          <a:solidFill>
+            <a:srgbClr val="EEF2FF"/>
+          </a:solidFill>
+          <a:ln w="19050">
+            <a:solidFill>
+              <a:srgbClr val="0E7490"/>
+            </a:solidFill>
+          </a:ln>
+        </p:spPr>
+        <p:style>
+          <a:lnRef idx="1">
+            <a:schemeClr val="accent1"/>
+          </a:lnRef>
+          <a:fillRef idx="3">
+            <a:schemeClr val="accent1"/>
+          </a:fillRef>
+          <a:effectRef idx="2">
+            <a:schemeClr val="accent1"/>
+          </a:effectRef>
+          <a:fontRef idx="minor">
+            <a:schemeClr val="lt1"/>
+          </a:fontRef>
+        </p:style>
+        <p:txBody>
+          <a:bodyPr rtlCol="0" anchor="ctr"/>
+          <a:lstStyle/>
+          <a:p>
+            <a:pPr algn="ctr"/>
+          </a:p>
+        </p:txBody>
+      </p:sp>
+      <p:sp>
+        <p:nvSpPr>
+          <p:cNvPr id="9" name="TextBox 8"/>
+          <p:cNvSpPr txBox="1"/>
+          <p:nvPr/>
+        </p:nvSpPr>
+        <p:spPr>
+          <a:xfrm>
+            <a:off x="6492240" y="1371600"/>
+            <a:ext cx="4846320" cy="4572000"/>
+          </a:xfrm>
+          <a:prstGeom prst="rect">
+            <a:avLst/>
+          </a:prstGeom>
+          <a:noFill/>
+        </p:spPr>
+        <p:txBody>
+          <a:bodyPr wrap="square">
+            <a:spAutoFit/>
+          </a:bodyPr>
+          <a:lstStyle/>
+          <a:p>
+            <a:pPr>
+              <a:spcAft>
+                <a:spcPts val="1000"/>
+              </a:spcAft>
+              <a:defRPr b="1" sz="1450">
+                <a:solidFill>
+                  <a:srgbClr val="0E7490"/>
+                </a:solidFill>
+              </a:defRPr>
+            </a:pPr>
+            <a:r>
+              <a:t>💡 Critical Conceptual Takeaways</a:t>
             </a:r>
           </a:p>
           <a:p>
@@ -4288,26 +4917,56 @@
               </a:spcAft>
               <a:defRPr sz="1200">
                 <a:solidFill>
-                  <a:srgbClr val="1E293B"/>
+                  <a:srgbClr val="0F172A"/>
                 </a:solidFill>
               </a:defRPr>
             </a:pPr>
             <a:r>
-              <a:t>→ FTP: TCP (Ports 20 &amp; 21)</a:t>
-            </a:r>
-          </a:p>
-        </p:txBody>
-      </p:sp>
-      <p:sp>
-        <p:nvSpPr>
-          <p:cNvPr id="9" name="TextBox 8"/>
+              <a:t>✔ Client-Server has centralized control and fixed IP; P2P possesses self-scalability as each leecher becomes a seeder.</a:t>
+            </a:r>
+          </a:p>
+          <a:p>
+            <a:pPr>
+              <a:spcAft>
+                <a:spcPts val="600"/>
+              </a:spcAft>
+              <a:defRPr sz="1200">
+                <a:solidFill>
+                  <a:srgbClr val="0F172A"/>
+                </a:solidFill>
+              </a:defRPr>
+            </a:pPr>
+            <a:r>
+              <a:t>✔ TCP provides 100% reliable byte-stream delivery with flow and congestion control.</a:t>
+            </a:r>
+          </a:p>
+          <a:p>
+            <a:pPr>
+              <a:spcAft>
+                <a:spcPts val="600"/>
+              </a:spcAft>
+              <a:defRPr sz="1200">
+                <a:solidFill>
+                  <a:srgbClr val="0F172A"/>
+                </a:solidFill>
+              </a:defRPr>
+            </a:pPr>
+            <a:r>
+              <a:t>✔ UDP provides low-latency, lightweight datagram delivery without handshake or congestion throttling.</a:t>
+            </a:r>
+          </a:p>
+        </p:txBody>
+      </p:sp>
+      <p:sp>
+        <p:nvSpPr>
+          <p:cNvPr id="10" name="TextBox 9"/>
           <p:cNvSpPr txBox="1"/>
           <p:nvPr/>
         </p:nvSpPr>
         <p:spPr>
           <a:xfrm>
-            <a:off x="731520" y="6309360"/>
-            <a:ext cx="10789920" cy="365760"/>
+            <a:off x="731520" y="6327648"/>
+            <a:ext cx="10789920" cy="320040"/>
           </a:xfrm>
           <a:prstGeom prst="rect">
             <a:avLst/>
@@ -4329,6 +4988,41 @@
             </a:pPr>
             <a:r>
               <a:t>PCCST501 Computer Networks | KTU 2024 Scheme | Prof. Anju Markose | Assistant Professor, Dept. of CSE | VJCET</a:t>
+            </a:r>
+          </a:p>
+        </p:txBody>
+      </p:sp>
+      <p:sp>
+        <p:nvSpPr>
+          <p:cNvPr id="11" name="TextBox 10"/>
+          <p:cNvSpPr txBox="1"/>
+          <p:nvPr/>
+        </p:nvSpPr>
+        <p:spPr>
+          <a:xfrm>
+            <a:off x="6858000" y="6327648"/>
+            <a:ext cx="4572000" cy="320040"/>
+          </a:xfrm>
+          <a:prstGeom prst="rect">
+            <a:avLst/>
+          </a:prstGeom>
+          <a:noFill/>
+        </p:spPr>
+        <p:txBody>
+          <a:bodyPr wrap="none">
+            <a:spAutoFit/>
+          </a:bodyPr>
+          <a:lstStyle/>
+          <a:p>
+            <a:pPr algn="r">
+              <a:defRPr sz="950">
+                <a:solidFill>
+                  <a:srgbClr val="64748B"/>
+                </a:solidFill>
+              </a:defRPr>
+            </a:pPr>
+            <a:r>
+              <a:t>Dept. of CSE, VJCET</a:t>
             </a:r>
           </a:p>
         </p:txBody>
